--- a/Decision Tree Learning.pptx
+++ b/Decision Tree Learning.pptx
@@ -155,7 +155,7 @@
           <a:p>
             <a:fld id="{D4E9D437-0D6E-488A-BC0F-1DA147950BC2}" type="datetimeFigureOut">
               <a:rPr lang="en-US" smtClean="0"/>
-              <a:t>9/21/2025</a:t>
+              <a:t>1/17/2026</a:t>
             </a:fld>
             <a:endParaRPr lang="en-US"/>
           </a:p>
@@ -333,7 +333,7 @@
           <a:p>
             <a:fld id="{056C52E4-9F7C-41DB-ACC8-041301328612}" type="datetimeFigureOut">
               <a:rPr lang="en-US" smtClean="0"/>
-              <a:t>9/21/2025</a:t>
+              <a:t>1/17/2026</a:t>
             </a:fld>
             <a:endParaRPr lang="en-US"/>
           </a:p>
@@ -4278,8 +4278,8 @@
           </a:p>
         </p:txBody>
       </p:sp>
-      <mc:AlternateContent xmlns:mc="http://schemas.openxmlformats.org/markup-compatibility/2006">
-        <mc:Choice xmlns:a14="http://schemas.microsoft.com/office/drawing/2010/main" Requires="a14">
+      <mc:AlternateContent xmlns:mc="http://schemas.openxmlformats.org/markup-compatibility/2006" xmlns:a14="http://schemas.microsoft.com/office/drawing/2010/main">
+        <mc:Choice Requires="a14">
           <p:sp>
             <p:nvSpPr>
               <p:cNvPr id="3" name="object 3"/>
@@ -4530,7 +4530,7 @@
             </p:txBody>
           </p:sp>
         </mc:Choice>
-        <mc:Fallback>
+        <mc:Fallback xmlns="">
           <p:sp>
             <p:nvSpPr>
               <p:cNvPr id="3" name="object 3"/>
@@ -5538,8 +5538,8 @@
           </a:p>
         </p:txBody>
       </p:sp>
-      <mc:AlternateContent xmlns:mc="http://schemas.openxmlformats.org/markup-compatibility/2006">
-        <mc:Choice xmlns:a14="http://schemas.microsoft.com/office/drawing/2010/main" Requires="a14">
+      <mc:AlternateContent xmlns:mc="http://schemas.openxmlformats.org/markup-compatibility/2006" xmlns:a14="http://schemas.microsoft.com/office/drawing/2010/main">
+        <mc:Choice Requires="a14">
           <p:sp>
             <p:nvSpPr>
               <p:cNvPr id="5" name="TextBox 4">
@@ -5856,7 +5856,7 @@
             </p:txBody>
           </p:sp>
         </mc:Choice>
-        <mc:Fallback>
+        <mc:Fallback xmlns="">
           <p:sp>
             <p:nvSpPr>
               <p:cNvPr id="5" name="TextBox 4">
@@ -13162,7 +13162,7 @@
           <a:lstStyle/>
           <a:p>
             <a:r>
-              <a:rPr lang="en-IN" sz="2000" dirty="0">
+              <a:rPr lang="en-IN" dirty="0">
                 <a:solidFill>
                   <a:schemeClr val="tx1"/>
                 </a:solidFill>
@@ -13256,7 +13256,7 @@
           <a:lstStyle/>
           <a:p>
             <a:r>
-              <a:rPr lang="en-IN" sz="2000" b="0" dirty="0">
+              <a:rPr lang="en-IN" b="0" dirty="0">
                 <a:solidFill>
                   <a:schemeClr val="tx1"/>
                 </a:solidFill>
@@ -13265,7 +13265,7 @@
               <a:t>A homogeneous regio</a:t>
             </a:r>
             <a:r>
-              <a:rPr lang="en-IN" sz="2000" dirty="0">
+              <a:rPr lang="en-IN" dirty="0">
                 <a:solidFill>
                   <a:schemeClr val="tx1"/>
                 </a:solidFill>
@@ -13273,7 +13273,7 @@
               </a:rPr>
               <a:t>n will have all (or a majority of) training inputs with the same/similar outputs</a:t>
             </a:r>
-            <a:endParaRPr lang="en-IN" sz="2000" b="0" dirty="0">
+            <a:endParaRPr lang="en-IN" b="0" dirty="0">
               <a:solidFill>
                 <a:schemeClr val="tx1"/>
               </a:solidFill>
